--- a/slides/Part1-Sistemas/01_05_EspectroBanda.pptx
+++ b/slides/Part1-Sistemas/01_05_EspectroBanda.pptx
@@ -5,10 +5,10 @@
     <p:sldMasterId id="2147483648" r:id="rId4"/>
   </p:sldMasterIdLst>
   <p:notesMasterIdLst>
-    <p:notesMasterId r:id="rId41"/>
+    <p:notesMasterId r:id="rId44"/>
   </p:notesMasterIdLst>
   <p:handoutMasterIdLst>
-    <p:handoutMasterId r:id="rId42"/>
+    <p:handoutMasterId r:id="rId45"/>
   </p:handoutMasterIdLst>
   <p:sldIdLst>
     <p:sldId id="259" r:id="rId5"/>
@@ -43,10 +43,13 @@
     <p:sldId id="373" r:id="rId34"/>
     <p:sldId id="375" r:id="rId35"/>
     <p:sldId id="368" r:id="rId36"/>
-    <p:sldId id="367" r:id="rId37"/>
-    <p:sldId id="376" r:id="rId38"/>
-    <p:sldId id="365" r:id="rId39"/>
-    <p:sldId id="379" r:id="rId40"/>
+    <p:sldId id="382" r:id="rId37"/>
+    <p:sldId id="383" r:id="rId38"/>
+    <p:sldId id="384" r:id="rId39"/>
+    <p:sldId id="367" r:id="rId40"/>
+    <p:sldId id="376" r:id="rId41"/>
+    <p:sldId id="365" r:id="rId42"/>
+    <p:sldId id="379" r:id="rId43"/>
   </p:sldIdLst>
   <p:sldSz cx="12192000" cy="6858000"/>
   <p:notesSz cx="7104063" cy="10234613"/>
@@ -186,6 +189,9 @@
             <p14:sldId id="373"/>
             <p14:sldId id="375"/>
             <p14:sldId id="368"/>
+            <p14:sldId id="382"/>
+            <p14:sldId id="383"/>
+            <p14:sldId id="384"/>
             <p14:sldId id="367"/>
             <p14:sldId id="376"/>
             <p14:sldId id="365"/>
@@ -311,7 +317,7 @@
           <a:p>
             <a:fld id="{073928FA-D2C6-41DE-B220-3F2DB2F37ACE}" type="datetimeFigureOut">
               <a:rPr lang="pt-BR" smtClean="0"/>
-              <a:t>28/08/2026</a:t>
+              <a:t>20/09/2026</a:t>
             </a:fld>
             <a:endParaRPr lang="pt-BR"/>
           </a:p>
@@ -476,7 +482,7 @@
           <a:p>
             <a:fld id="{BA67B741-5C22-4E92-9233-564803058EDF}" type="datetimeFigureOut">
               <a:rPr lang="pt-BR" smtClean="0"/>
-              <a:t>27/08/2026</a:t>
+              <a:t>20/09/2026</a:t>
             </a:fld>
             <a:endParaRPr lang="pt-BR"/>
           </a:p>
@@ -3151,8 +3157,8 @@
             </a:p>
           </p:txBody>
         </p:sp>
-        <mc:AlternateContent xmlns:mc="http://schemas.openxmlformats.org/markup-compatibility/2006">
-          <mc:Choice xmlns:a14="http://schemas.microsoft.com/office/drawing/2010/main" Requires="a14">
+        <mc:AlternateContent xmlns:mc="http://schemas.openxmlformats.org/markup-compatibility/2006" xmlns:a14="http://schemas.microsoft.com/office/drawing/2010/main">
+          <mc:Choice Requires="a14">
             <p:sp>
               <p:nvSpPr>
                 <p:cNvPr id="7" name="Text Box 15">
@@ -3271,7 +3277,7 @@
               </p:txBody>
             </p:sp>
           </mc:Choice>
-          <mc:Fallback>
+          <mc:Fallback xmlns="">
             <p:sp>
               <p:nvSpPr>
                 <p:cNvPr id="7" name="Text Box 15">
@@ -4093,8 +4099,8 @@
           </a:fontRef>
         </p:style>
       </p:cxnSp>
-      <mc:AlternateContent xmlns:mc="http://schemas.openxmlformats.org/markup-compatibility/2006">
-        <mc:Choice xmlns:a14="http://schemas.microsoft.com/office/drawing/2010/main" Requires="a14">
+      <mc:AlternateContent xmlns:mc="http://schemas.openxmlformats.org/markup-compatibility/2006" xmlns:a14="http://schemas.microsoft.com/office/drawing/2010/main">
+        <mc:Choice Requires="a14">
           <p:sp>
             <p:nvSpPr>
               <p:cNvPr id="29" name="Text Box 15">
@@ -4213,7 +4219,7 @@
             </p:txBody>
           </p:sp>
         </mc:Choice>
-        <mc:Fallback>
+        <mc:Fallback xmlns="">
           <p:sp>
             <p:nvSpPr>
               <p:cNvPr id="29" name="Text Box 15">
@@ -4729,8 +4735,8 @@
           </a:prstGeom>
         </p:spPr>
       </p:pic>
-      <mc:AlternateContent xmlns:mc="http://schemas.openxmlformats.org/markup-compatibility/2006">
-        <mc:Choice xmlns:a14="http://schemas.microsoft.com/office/drawing/2010/main" Requires="a14">
+      <mc:AlternateContent xmlns:mc="http://schemas.openxmlformats.org/markup-compatibility/2006" xmlns:a14="http://schemas.microsoft.com/office/drawing/2010/main">
+        <mc:Choice Requires="a14">
           <p:sp>
             <p:nvSpPr>
               <p:cNvPr id="3" name="Espaço Reservado para Conteúdo 2">
@@ -4969,7 +4975,7 @@
                     <m:f>
                       <m:fPr>
                         <m:ctrlPr>
-                          <a:rPr lang="pt-BR" i="1">
+                          <a:rPr lang="pt-BR" b="0" i="1" smtClean="0">
                             <a:latin typeface="Cambria Math" panose="02040503050406030204" pitchFamily="18" charset="0"/>
                           </a:rPr>
                         </m:ctrlPr>
@@ -5049,7 +5055,7 @@
             </p:txBody>
           </p:sp>
         </mc:Choice>
-        <mc:Fallback>
+        <mc:Fallback xmlns="">
           <p:sp>
             <p:nvSpPr>
               <p:cNvPr id="3" name="Espaço Reservado para Conteúdo 2">
@@ -5707,8 +5713,8 @@
           </a:fontRef>
         </p:style>
       </p:cxnSp>
-      <mc:AlternateContent xmlns:mc="http://schemas.openxmlformats.org/markup-compatibility/2006">
-        <mc:Choice xmlns:a14="http://schemas.microsoft.com/office/drawing/2010/main" Requires="a14">
+      <mc:AlternateContent xmlns:mc="http://schemas.openxmlformats.org/markup-compatibility/2006" xmlns:a14="http://schemas.microsoft.com/office/drawing/2010/main">
+        <mc:Choice Requires="a14">
           <p:sp>
             <p:nvSpPr>
               <p:cNvPr id="7" name="CaixaDeTexto 6">
@@ -5795,7 +5801,7 @@
             </p:txBody>
           </p:sp>
         </mc:Choice>
-        <mc:Fallback>
+        <mc:Fallback xmlns="">
           <p:sp>
             <p:nvSpPr>
               <p:cNvPr id="7" name="CaixaDeTexto 6">
@@ -5840,8 +5846,8 @@
           </p:sp>
         </mc:Fallback>
       </mc:AlternateContent>
-      <mc:AlternateContent xmlns:mc="http://schemas.openxmlformats.org/markup-compatibility/2006">
-        <mc:Choice xmlns:a14="http://schemas.microsoft.com/office/drawing/2010/main" Requires="a14">
+      <mc:AlternateContent xmlns:mc="http://schemas.openxmlformats.org/markup-compatibility/2006" xmlns:a14="http://schemas.microsoft.com/office/drawing/2010/main">
+        <mc:Choice Requires="a14">
           <p:sp>
             <p:nvSpPr>
               <p:cNvPr id="14" name="CaixaDeTexto 13">
@@ -6034,7 +6040,7 @@
             </p:txBody>
           </p:sp>
         </mc:Choice>
-        <mc:Fallback>
+        <mc:Fallback xmlns="">
           <p:sp>
             <p:nvSpPr>
               <p:cNvPr id="14" name="CaixaDeTexto 13">
@@ -6281,8 +6287,8 @@
           </a:p>
         </p:txBody>
       </p:sp>
-      <mc:AlternateContent xmlns:mc="http://schemas.openxmlformats.org/markup-compatibility/2006">
-        <mc:Choice xmlns:a14="http://schemas.microsoft.com/office/drawing/2010/main" Requires="a14">
+      <mc:AlternateContent xmlns:mc="http://schemas.openxmlformats.org/markup-compatibility/2006" xmlns:a14="http://schemas.microsoft.com/office/drawing/2010/main">
+        <mc:Choice Requires="a14">
           <p:sp>
             <p:nvSpPr>
               <p:cNvPr id="3" name="Espaço Reservado para Conteúdo 2">
@@ -6648,7 +6654,9 @@
                 <a14:m>
                   <m:oMath xmlns:m="http://schemas.openxmlformats.org/officeDocument/2006/math">
                     <m:r>
-                      <a:rPr lang="pt-BR" b="0" i="0" smtClean="0"/>
+                      <a:rPr lang="pt-BR" b="0" i="0" smtClean="0">
+                        <a:latin typeface="Cambria Math" panose="02040503050406030204" pitchFamily="18" charset="0"/>
+                      </a:rPr>
                       <m:t> </m:t>
                     </m:r>
                   </m:oMath>
@@ -6807,7 +6815,7 @@
             </p:txBody>
           </p:sp>
         </mc:Choice>
-        <mc:Fallback>
+        <mc:Fallback xmlns="">
           <p:sp>
             <p:nvSpPr>
               <p:cNvPr id="3" name="Espaço Reservado para Conteúdo 2">
@@ -6917,8 +6925,8 @@
           </a:p>
         </p:txBody>
       </p:sp>
-      <mc:AlternateContent xmlns:mc="http://schemas.openxmlformats.org/markup-compatibility/2006">
-        <mc:Choice xmlns:a14="http://schemas.microsoft.com/office/drawing/2010/main" Requires="a14">
+      <mc:AlternateContent xmlns:mc="http://schemas.openxmlformats.org/markup-compatibility/2006" xmlns:a14="http://schemas.microsoft.com/office/drawing/2010/main">
+        <mc:Choice Requires="a14">
           <p:sp>
             <p:nvSpPr>
               <p:cNvPr id="3" name="Espaço Reservado para Conteúdo 2">
@@ -7364,7 +7372,7 @@
             </p:txBody>
           </p:sp>
         </mc:Choice>
-        <mc:Fallback>
+        <mc:Fallback xmlns="">
           <p:sp>
             <p:nvSpPr>
               <p:cNvPr id="3" name="Espaço Reservado para Conteúdo 2">
@@ -7712,8 +7720,8 @@
           </a:p>
         </p:txBody>
       </p:sp>
-      <mc:AlternateContent xmlns:mc="http://schemas.openxmlformats.org/markup-compatibility/2006">
-        <mc:Choice xmlns:a14="http://schemas.microsoft.com/office/drawing/2010/main" Requires="a14">
+      <mc:AlternateContent xmlns:mc="http://schemas.openxmlformats.org/markup-compatibility/2006" xmlns:a14="http://schemas.microsoft.com/office/drawing/2010/main">
+        <mc:Choice Requires="a14">
           <p:sp>
             <p:nvSpPr>
               <p:cNvPr id="3" name="Espaço Reservado para Conteúdo 2">
@@ -8406,13 +8414,7 @@
                             <a:rPr lang="pt-BR" b="0" i="1" smtClean="0">
                               <a:latin typeface="Cambria Math" panose="02040503050406030204" pitchFamily="18" charset="0"/>
                             </a:rPr>
-                            <m:t>𝑇</m:t>
-                          </m:r>
-                          <m:r>
-                            <a:rPr lang="pt-BR" b="0" i="1" smtClean="0">
-                              <a:latin typeface="Cambria Math" panose="02040503050406030204" pitchFamily="18" charset="0"/>
-                            </a:rPr>
-                            <m:t>𝐴</m:t>
+                            <m:t>𝑇𝐴</m:t>
                           </m:r>
                         </m:e>
                         <m:sup>
@@ -8749,7 +8751,7 @@
             </p:txBody>
           </p:sp>
         </mc:Choice>
-        <mc:Fallback>
+        <mc:Fallback xmlns="">
           <p:sp>
             <p:nvSpPr>
               <p:cNvPr id="3" name="Espaço Reservado para Conteúdo 2">
@@ -8938,8 +8940,8 @@
           </a:p>
         </p:txBody>
       </p:sp>
-      <mc:AlternateContent xmlns:mc="http://schemas.openxmlformats.org/markup-compatibility/2006">
-        <mc:Choice xmlns:a14="http://schemas.microsoft.com/office/drawing/2010/main" Requires="a14">
+      <mc:AlternateContent xmlns:mc="http://schemas.openxmlformats.org/markup-compatibility/2006" xmlns:a14="http://schemas.microsoft.com/office/drawing/2010/main">
+        <mc:Choice Requires="a14">
           <p:sp>
             <p:nvSpPr>
               <p:cNvPr id="3" name="Espaço Reservado para Conteúdo 2">
@@ -9094,7 +9096,7 @@
             </p:txBody>
           </p:sp>
         </mc:Choice>
-        <mc:Fallback>
+        <mc:Fallback xmlns="">
           <p:sp>
             <p:nvSpPr>
               <p:cNvPr id="3" name="Espaço Reservado para Conteúdo 2">
@@ -9244,8 +9246,8 @@
           </a:p>
         </p:txBody>
       </p:sp>
-      <mc:AlternateContent xmlns:mc="http://schemas.openxmlformats.org/markup-compatibility/2006">
-        <mc:Choice xmlns:a14="http://schemas.microsoft.com/office/drawing/2010/main" Requires="a14">
+      <mc:AlternateContent xmlns:mc="http://schemas.openxmlformats.org/markup-compatibility/2006" xmlns:a14="http://schemas.microsoft.com/office/drawing/2010/main">
+        <mc:Choice Requires="a14">
           <p:sp>
             <p:nvSpPr>
               <p:cNvPr id="3" name="Espaço Reservado para Conteúdo 2">
@@ -10005,7 +10007,7 @@
             </p:txBody>
           </p:sp>
         </mc:Choice>
-        <mc:Fallback>
+        <mc:Fallback xmlns="">
           <p:sp>
             <p:nvSpPr>
               <p:cNvPr id="3" name="Espaço Reservado para Conteúdo 2">
@@ -10252,8 +10254,8 @@
           </a:p>
         </p:txBody>
       </p:sp>
-      <mc:AlternateContent xmlns:mc="http://schemas.openxmlformats.org/markup-compatibility/2006">
-        <mc:Choice xmlns:a14="http://schemas.microsoft.com/office/drawing/2010/main" Requires="a14">
+      <mc:AlternateContent xmlns:mc="http://schemas.openxmlformats.org/markup-compatibility/2006" xmlns:a14="http://schemas.microsoft.com/office/drawing/2010/main">
+        <mc:Choice Requires="a14">
           <p:sp>
             <p:nvSpPr>
               <p:cNvPr id="9" name="CaixaDeTexto 8">
@@ -10447,7 +10449,7 @@
             </p:txBody>
           </p:sp>
         </mc:Choice>
-        <mc:Fallback>
+        <mc:Fallback xmlns="">
           <p:sp>
             <p:nvSpPr>
               <p:cNvPr id="9" name="CaixaDeTexto 8">
@@ -10492,8 +10494,8 @@
           </p:sp>
         </mc:Fallback>
       </mc:AlternateContent>
-      <mc:AlternateContent xmlns:mc="http://schemas.openxmlformats.org/markup-compatibility/2006">
-        <mc:Choice xmlns:a14="http://schemas.microsoft.com/office/drawing/2010/main" Requires="a14">
+      <mc:AlternateContent xmlns:mc="http://schemas.openxmlformats.org/markup-compatibility/2006" xmlns:a14="http://schemas.microsoft.com/office/drawing/2010/main">
+        <mc:Choice Requires="a14">
           <p:sp>
             <p:nvSpPr>
               <p:cNvPr id="17" name="CaixaDeTexto 16">
@@ -10897,7 +10899,7 @@
             </p:txBody>
           </p:sp>
         </mc:Choice>
-        <mc:Fallback>
+        <mc:Fallback xmlns="">
           <p:sp>
             <p:nvSpPr>
               <p:cNvPr id="17" name="CaixaDeTexto 16">
@@ -11108,8 +11110,8 @@
           </a:p>
         </p:txBody>
       </p:sp>
-      <mc:AlternateContent xmlns:mc="http://schemas.openxmlformats.org/markup-compatibility/2006">
-        <mc:Choice xmlns:a14="http://schemas.microsoft.com/office/drawing/2010/main" Requires="a14">
+      <mc:AlternateContent xmlns:mc="http://schemas.openxmlformats.org/markup-compatibility/2006" xmlns:a14="http://schemas.microsoft.com/office/drawing/2010/main">
+        <mc:Choice Requires="a14">
           <p:sp>
             <p:nvSpPr>
               <p:cNvPr id="3" name="Espaço Reservado para Conteúdo 2">
@@ -11565,7 +11567,7 @@
             </p:txBody>
           </p:sp>
         </mc:Choice>
-        <mc:Fallback>
+        <mc:Fallback xmlns="">
           <p:sp>
             <p:nvSpPr>
               <p:cNvPr id="3" name="Espaço Reservado para Conteúdo 2">
@@ -11688,8 +11690,8 @@
           </a:p>
         </p:txBody>
       </p:sp>
-      <mc:AlternateContent xmlns:mc="http://schemas.openxmlformats.org/markup-compatibility/2006">
-        <mc:Choice xmlns:a14="http://schemas.microsoft.com/office/drawing/2010/main" Requires="a14">
+      <mc:AlternateContent xmlns:mc="http://schemas.openxmlformats.org/markup-compatibility/2006" xmlns:a14="http://schemas.microsoft.com/office/drawing/2010/main">
+        <mc:Choice Requires="a14">
           <p:sp>
             <p:nvSpPr>
               <p:cNvPr id="3" name="Espaço Reservado para Conteúdo 2">
@@ -12023,7 +12025,7 @@
             </p:txBody>
           </p:sp>
         </mc:Choice>
-        <mc:Fallback>
+        <mc:Fallback xmlns="">
           <p:sp>
             <p:nvSpPr>
               <p:cNvPr id="3" name="Espaço Reservado para Conteúdo 2">
@@ -12642,8 +12644,8 @@
           </a:p>
         </p:txBody>
       </p:sp>
-      <mc:AlternateContent xmlns:mc="http://schemas.openxmlformats.org/markup-compatibility/2006">
-        <mc:Choice xmlns:a14="http://schemas.microsoft.com/office/drawing/2010/main" Requires="a14">
+      <mc:AlternateContent xmlns:mc="http://schemas.openxmlformats.org/markup-compatibility/2006" xmlns:a14="http://schemas.microsoft.com/office/drawing/2010/main">
+        <mc:Choice Requires="a14">
           <p:sp>
             <p:nvSpPr>
               <p:cNvPr id="13" name="Objeto 12">
@@ -13394,7 +13396,7 @@
             </p:txBody>
           </p:sp>
         </mc:Choice>
-        <mc:Fallback>
+        <mc:Fallback xmlns="">
           <p:sp>
             <p:nvSpPr>
               <p:cNvPr id="13" name="Objeto 12">
@@ -13622,8 +13624,8 @@
           </a:p>
         </p:txBody>
       </p:sp>
-      <mc:AlternateContent xmlns:mc="http://schemas.openxmlformats.org/markup-compatibility/2006">
-        <mc:Choice xmlns:a14="http://schemas.microsoft.com/office/drawing/2010/main" Requires="a14">
+      <mc:AlternateContent xmlns:mc="http://schemas.openxmlformats.org/markup-compatibility/2006" xmlns:a14="http://schemas.microsoft.com/office/drawing/2010/main">
+        <mc:Choice Requires="a14">
           <p:sp>
             <p:nvSpPr>
               <p:cNvPr id="3" name="Espaço Reservado para Conteúdo 2">
@@ -13761,7 +13763,7 @@
                       <m:func>
                         <m:funcPr>
                           <m:ctrlPr>
-                            <a:rPr lang="pt-BR" b="0" i="0" smtClean="0">
+                            <a:rPr lang="pt-BR" b="0" i="1" smtClean="0">
                               <a:latin typeface="Cambria Math" panose="02040503050406030204" pitchFamily="18" charset="0"/>
                             </a:rPr>
                           </m:ctrlPr>
@@ -13967,7 +13969,7 @@
                               <m:f>
                                 <m:fPr>
                                   <m:ctrlPr>
-                                    <a:rPr lang="pt-BR" i="1">
+                                    <a:rPr lang="pt-BR" b="0" i="1" smtClean="0">
                                       <a:latin typeface="Cambria Math" panose="02040503050406030204" pitchFamily="18" charset="0"/>
                                     </a:rPr>
                                   </m:ctrlPr>
@@ -14060,7 +14062,7 @@
                       <m:func>
                         <m:funcPr>
                           <m:ctrlPr>
-                            <a:rPr lang="pt-BR" b="0" i="1" smtClean="0">
+                            <a:rPr lang="pt-BR" i="1">
                               <a:latin typeface="Cambria Math" panose="02040503050406030204" pitchFamily="18" charset="0"/>
                             </a:rPr>
                           </m:ctrlPr>
@@ -14108,7 +14110,7 @@
                               <m:f>
                                 <m:fPr>
                                   <m:ctrlPr>
-                                    <a:rPr lang="pt-BR" i="1">
+                                    <a:rPr lang="pt-BR" b="0" i="1" smtClean="0">
                                       <a:latin typeface="Cambria Math" panose="02040503050406030204" pitchFamily="18" charset="0"/>
                                     </a:rPr>
                                   </m:ctrlPr>
@@ -14402,7 +14404,7 @@
             </p:txBody>
           </p:sp>
         </mc:Choice>
-        <mc:Fallback>
+        <mc:Fallback xmlns="">
           <p:sp>
             <p:nvSpPr>
               <p:cNvPr id="3" name="Espaço Reservado para Conteúdo 2">
@@ -14519,8 +14521,8 @@
           </a:p>
         </p:txBody>
       </p:sp>
-      <mc:AlternateContent xmlns:mc="http://schemas.openxmlformats.org/markup-compatibility/2006">
-        <mc:Choice xmlns:a14="http://schemas.microsoft.com/office/drawing/2010/main" Requires="a14">
+      <mc:AlternateContent xmlns:mc="http://schemas.openxmlformats.org/markup-compatibility/2006" xmlns:a14="http://schemas.microsoft.com/office/drawing/2010/main">
+        <mc:Choice Requires="a14">
           <p:sp>
             <p:nvSpPr>
               <p:cNvPr id="3" name="Espaço Reservado para Conteúdo 2">
@@ -14659,14 +14661,7 @@
                               <a:latin typeface="Cambria Math" panose="02040503050406030204" pitchFamily="18" charset="0"/>
                               <a:ea typeface="Cambria Math" panose="02040503050406030204" pitchFamily="18" charset="0"/>
                             </a:rPr>
-                            <m:t>𝐵</m:t>
-                          </m:r>
-                          <m:r>
-                            <a:rPr lang="pt-BR" b="0" i="1" smtClean="0">
-                              <a:latin typeface="Cambria Math" panose="02040503050406030204" pitchFamily="18" charset="0"/>
-                              <a:ea typeface="Cambria Math" panose="02040503050406030204" pitchFamily="18" charset="0"/>
-                            </a:rPr>
-                            <m:t>𝑁</m:t>
+                            <m:t>𝐵𝑁</m:t>
                           </m:r>
                         </m:e>
                         <m:sub>
@@ -14703,7 +14698,7 @@
             </p:txBody>
           </p:sp>
         </mc:Choice>
-        <mc:Fallback>
+        <mc:Fallback xmlns="">
           <p:sp>
             <p:nvSpPr>
               <p:cNvPr id="3" name="Espaço Reservado para Conteúdo 2">
@@ -15091,7 +15086,18 @@
                     </m:r>
                   </m:oMath>
                 </a14:m>
-                <a:endParaRPr lang="pt-BR" dirty="0"/>
+                <a:r>
+                  <a:rPr lang="pt-BR" dirty="0"/>
+                  <a:t> V</a:t>
+                </a:r>
+                <a:r>
+                  <a:rPr lang="pt-BR" baseline="30000" dirty="0"/>
+                  <a:t>2</a:t>
+                </a:r>
+                <a:r>
+                  <a:rPr lang="pt-BR" dirty="0"/>
+                  <a:t>/Hz</a:t>
+                </a:r>
               </a:p>
               <a:p>
                 <a:pPr lvl="1"/>
@@ -15309,6 +15315,1209 @@
           <p:cNvPr id="2" name="Título 1">
             <a:extLst>
               <a:ext uri="{FF2B5EF4-FFF2-40B4-BE49-F238E27FC236}">
+                <a16:creationId xmlns:a16="http://schemas.microsoft.com/office/drawing/2014/main" id="{1CE311A4-837A-DE55-128C-F1701156EB8E}"/>
+              </a:ext>
+            </a:extLst>
+          </p:cNvPr>
+          <p:cNvSpPr>
+            <a:spLocks noGrp="1"/>
+          </p:cNvSpPr>
+          <p:nvPr>
+            <p:ph type="title"/>
+          </p:nvPr>
+        </p:nvSpPr>
+        <p:spPr/>
+        <p:txBody>
+          <a:bodyPr/>
+          <a:lstStyle/>
+          <a:p>
+            <a:r>
+              <a:rPr lang="pt-BR" dirty="0"/>
+              <a:t>Ruído Térmico</a:t>
+            </a:r>
+            <a:br>
+              <a:rPr lang="pt-BR" dirty="0"/>
+            </a:br>
+            <a:r>
+              <a:rPr lang="pt-BR" dirty="0"/>
+              <a:t>Modelo</a:t>
+            </a:r>
+          </a:p>
+        </p:txBody>
+      </p:sp>
+      <p:pic>
+        <p:nvPicPr>
+          <p:cNvPr id="4" name="Imagem 3">
+            <a:extLst>
+              <a:ext uri="{FF2B5EF4-FFF2-40B4-BE49-F238E27FC236}">
+                <a16:creationId xmlns:a16="http://schemas.microsoft.com/office/drawing/2014/main" id="{B28077FE-4638-45C3-7F2D-278C68E309C3}"/>
+              </a:ext>
+            </a:extLst>
+          </p:cNvPr>
+          <p:cNvPicPr>
+            <a:picLocks noChangeAspect="1"/>
+          </p:cNvPicPr>
+          <p:nvPr/>
+        </p:nvPicPr>
+        <p:blipFill>
+          <a:blip r:embed="rId2"/>
+          <a:stretch>
+            <a:fillRect/>
+          </a:stretch>
+        </p:blipFill>
+        <p:spPr>
+          <a:xfrm>
+            <a:off x="1168073" y="1607003"/>
+            <a:ext cx="3876675" cy="4057650"/>
+          </a:xfrm>
+          <a:prstGeom prst="rect">
+            <a:avLst/>
+          </a:prstGeom>
+        </p:spPr>
+      </p:pic>
+      <p:pic>
+        <p:nvPicPr>
+          <p:cNvPr id="5" name="Imagem 4" descr="Norton model of resistor thermal noise. | Download Scientific Diagram">
+            <a:extLst>
+              <a:ext uri="{FF2B5EF4-FFF2-40B4-BE49-F238E27FC236}">
+                <a16:creationId xmlns:a16="http://schemas.microsoft.com/office/drawing/2014/main" id="{3343386B-8A0B-A8A4-A7EE-975CC9DA11A4}"/>
+              </a:ext>
+            </a:extLst>
+          </p:cNvPr>
+          <p:cNvPicPr>
+            <a:picLocks noChangeAspect="1"/>
+          </p:cNvPicPr>
+          <p:nvPr/>
+        </p:nvPicPr>
+        <p:blipFill>
+          <a:blip r:embed="rId3"/>
+          <a:stretch>
+            <a:fillRect/>
+          </a:stretch>
+        </p:blipFill>
+        <p:spPr>
+          <a:xfrm>
+            <a:off x="5864976" y="1904765"/>
+            <a:ext cx="5064962" cy="3462126"/>
+          </a:xfrm>
+          <a:prstGeom prst="rect">
+            <a:avLst/>
+          </a:prstGeom>
+        </p:spPr>
+      </p:pic>
+      <mc:AlternateContent xmlns:mc="http://schemas.openxmlformats.org/markup-compatibility/2006">
+        <mc:Choice xmlns:a14="http://schemas.microsoft.com/office/drawing/2010/main" Requires="a14">
+          <p:sp>
+            <p:nvSpPr>
+              <p:cNvPr id="6" name="CaixaDeTexto 5">
+                <a:extLst>
+                  <a:ext uri="{FF2B5EF4-FFF2-40B4-BE49-F238E27FC236}">
+                    <a16:creationId xmlns:a16="http://schemas.microsoft.com/office/drawing/2014/main" id="{E994EE69-2C10-73DF-DCDA-9C59B13E6D59}"/>
+                  </a:ext>
+                </a:extLst>
+              </p:cNvPr>
+              <p:cNvSpPr txBox="1"/>
+              <p:nvPr/>
+            </p:nvSpPr>
+            <p:spPr>
+              <a:xfrm>
+                <a:off x="5302905" y="2891233"/>
+                <a:ext cx="1844349" cy="1489190"/>
+              </a:xfrm>
+              <a:prstGeom prst="rect">
+                <a:avLst/>
+              </a:prstGeom>
+              <a:solidFill>
+                <a:srgbClr val="FFFFFF"/>
+              </a:solidFill>
+            </p:spPr>
+            <p:txBody>
+              <a:bodyPr wrap="square" rtlCol="0">
+                <a:spAutoFit/>
+              </a:bodyPr>
+              <a:lstStyle/>
+              <a:p>
+                <a:pPr algn="r"/>
+                <a14:m>
+                  <m:oMathPara xmlns:m="http://schemas.openxmlformats.org/officeDocument/2006/math">
+                    <m:oMathParaPr>
+                      <m:jc m:val="right"/>
+                    </m:oMathParaPr>
+                    <m:oMath>
+                      <m:f>
+                        <m:fPr>
+                          <m:ctrlPr>
+                            <a:rPr lang="pt-BR" sz="4400" b="1" i="1" smtClean="0">
+                              <a:latin typeface="Cambria Math" panose="02040503050406030204" pitchFamily="18" charset="0"/>
+                            </a:rPr>
+                          </m:ctrlPr>
+                        </m:fPr>
+                        <m:num>
+                          <m:r>
+                            <a:rPr lang="pt-BR" sz="4400" b="1" i="1" smtClean="0">
+                              <a:latin typeface="Cambria Math" panose="02040503050406030204" pitchFamily="18" charset="0"/>
+                            </a:rPr>
+                            <m:t>𝟐</m:t>
+                          </m:r>
+                          <m:r>
+                            <a:rPr lang="pt-BR" sz="4400" b="1" i="1" smtClean="0">
+                              <a:latin typeface="Cambria Math" panose="02040503050406030204" pitchFamily="18" charset="0"/>
+                            </a:rPr>
+                            <m:t>𝒌𝑻</m:t>
+                          </m:r>
+                        </m:num>
+                        <m:den>
+                          <m:sSub>
+                            <m:sSubPr>
+                              <m:ctrlPr>
+                                <a:rPr lang="pt-BR" sz="4400" b="1" i="1" smtClean="0">
+                                  <a:latin typeface="Cambria Math" panose="02040503050406030204" pitchFamily="18" charset="0"/>
+                                </a:rPr>
+                              </m:ctrlPr>
+                            </m:sSubPr>
+                            <m:e>
+                              <m:r>
+                                <a:rPr lang="pt-BR" sz="4400" b="1" i="1" smtClean="0">
+                                  <a:latin typeface="Cambria Math" panose="02040503050406030204" pitchFamily="18" charset="0"/>
+                                </a:rPr>
+                                <m:t>𝑹</m:t>
+                              </m:r>
+                            </m:e>
+                            <m:sub>
+                              <m:r>
+                                <a:rPr lang="pt-BR" sz="4400" b="1" i="1" smtClean="0">
+                                  <a:latin typeface="Cambria Math" panose="02040503050406030204" pitchFamily="18" charset="0"/>
+                                </a:rPr>
+                                <m:t>𝟏</m:t>
+                              </m:r>
+                            </m:sub>
+                          </m:sSub>
+                        </m:den>
+                      </m:f>
+                    </m:oMath>
+                  </m:oMathPara>
+                </a14:m>
+                <a:endParaRPr lang="pt-BR" sz="4400" b="1" baseline="-25000" dirty="0"/>
+              </a:p>
+            </p:txBody>
+          </p:sp>
+        </mc:Choice>
+        <mc:Fallback>
+          <p:sp>
+            <p:nvSpPr>
+              <p:cNvPr id="6" name="CaixaDeTexto 5">
+                <a:extLst>
+                  <a:ext uri="{FF2B5EF4-FFF2-40B4-BE49-F238E27FC236}">
+                    <a16:creationId xmlns:a16="http://schemas.microsoft.com/office/drawing/2014/main" id="{E994EE69-2C10-73DF-DCDA-9C59B13E6D59}"/>
+                  </a:ext>
+                </a:extLst>
+              </p:cNvPr>
+              <p:cNvSpPr txBox="1">
+                <a:spLocks noRot="1" noChangeAspect="1" noMove="1" noResize="1" noEditPoints="1" noAdjustHandles="1" noChangeArrowheads="1" noChangeShapeType="1" noTextEdit="1"/>
+              </p:cNvSpPr>
+              <p:nvPr/>
+            </p:nvSpPr>
+            <p:spPr>
+              <a:xfrm>
+                <a:off x="5302905" y="2891233"/>
+                <a:ext cx="1844349" cy="1489190"/>
+              </a:xfrm>
+              <a:prstGeom prst="rect">
+                <a:avLst/>
+              </a:prstGeom>
+              <a:blipFill>
+                <a:blip r:embed="rId4"/>
+                <a:stretch>
+                  <a:fillRect/>
+                </a:stretch>
+              </a:blipFill>
+            </p:spPr>
+            <p:txBody>
+              <a:bodyPr/>
+              <a:lstStyle/>
+              <a:p>
+                <a:r>
+                  <a:rPr lang="pt-BR">
+                    <a:noFill/>
+                  </a:rPr>
+                  <a:t> </a:t>
+                </a:r>
+              </a:p>
+            </p:txBody>
+          </p:sp>
+        </mc:Fallback>
+      </mc:AlternateContent>
+      <p:sp>
+        <p:nvSpPr>
+          <p:cNvPr id="8" name="CaixaDeTexto 7">
+            <a:extLst>
+              <a:ext uri="{FF2B5EF4-FFF2-40B4-BE49-F238E27FC236}">
+                <a16:creationId xmlns:a16="http://schemas.microsoft.com/office/drawing/2014/main" id="{4144D399-F272-F5AA-21A6-CB4CA0B04EC7}"/>
+              </a:ext>
+            </a:extLst>
+          </p:cNvPr>
+          <p:cNvSpPr txBox="1"/>
+          <p:nvPr/>
+        </p:nvSpPr>
+        <p:spPr>
+          <a:xfrm>
+            <a:off x="1262062" y="3814082"/>
+            <a:ext cx="1844349" cy="769441"/>
+          </a:xfrm>
+          <a:prstGeom prst="rect">
+            <a:avLst/>
+          </a:prstGeom>
+          <a:solidFill>
+            <a:srgbClr val="FFFFFF"/>
+          </a:solidFill>
+        </p:spPr>
+        <p:txBody>
+          <a:bodyPr wrap="square" rtlCol="0">
+            <a:spAutoFit/>
+          </a:bodyPr>
+          <a:lstStyle/>
+          <a:p>
+            <a:pPr algn="r"/>
+            <a:r>
+              <a:rPr lang="pt-BR" sz="4400" b="1" dirty="0"/>
+              <a:t>2</a:t>
+            </a:r>
+            <a:r>
+              <a:rPr lang="pt-BR" sz="4400" b="1" i="1" dirty="0"/>
+              <a:t>kTR</a:t>
+            </a:r>
+            <a:r>
+              <a:rPr lang="pt-BR" sz="4400" b="1" baseline="-25000" dirty="0"/>
+              <a:t>1</a:t>
+            </a:r>
+          </a:p>
+        </p:txBody>
+      </p:sp>
+    </p:spTree>
+    <p:extLst>
+      <p:ext uri="{BB962C8B-B14F-4D97-AF65-F5344CB8AC3E}">
+        <p14:creationId xmlns:p14="http://schemas.microsoft.com/office/powerpoint/2010/main" val="2083821305"/>
+      </p:ext>
+    </p:extLst>
+  </p:cSld>
+  <p:clrMapOvr>
+    <a:masterClrMapping/>
+  </p:clrMapOvr>
+  <mc:AlternateContent xmlns:mc="http://schemas.openxmlformats.org/markup-compatibility/2006" xmlns:p14="http://schemas.microsoft.com/office/powerpoint/2010/main">
+    <mc:Choice Requires="p14">
+      <p:transition spd="med" p14:dur="700">
+        <p:fade/>
+      </p:transition>
+    </mc:Choice>
+    <mc:Fallback xmlns="">
+      <p:transition spd="med">
+        <p:fade/>
+      </p:transition>
+    </mc:Fallback>
+  </mc:AlternateContent>
+</p:sld>
+</file>
+
+<file path=ppt/slides/slide34.xml><?xml version="1.0" encoding="utf-8"?>
+<p:sld xmlns:a="http://schemas.openxmlformats.org/drawingml/2006/main" xmlns:r="http://schemas.openxmlformats.org/officeDocument/2006/relationships" xmlns:p="http://schemas.openxmlformats.org/presentationml/2006/main">
+  <p:cSld>
+    <p:spTree>
+      <p:nvGrpSpPr>
+        <p:cNvPr id="1" name=""/>
+        <p:cNvGrpSpPr/>
+        <p:nvPr/>
+      </p:nvGrpSpPr>
+      <p:grpSpPr>
+        <a:xfrm>
+          <a:off x="0" y="0"/>
+          <a:ext cx="0" cy="0"/>
+          <a:chOff x="0" y="0"/>
+          <a:chExt cx="0" cy="0"/>
+        </a:xfrm>
+      </p:grpSpPr>
+      <p:sp>
+        <p:nvSpPr>
+          <p:cNvPr id="2" name="Título 1">
+            <a:extLst>
+              <a:ext uri="{FF2B5EF4-FFF2-40B4-BE49-F238E27FC236}">
+                <a16:creationId xmlns:a16="http://schemas.microsoft.com/office/drawing/2014/main" id="{BDC76E1E-5977-845C-FC67-13960D0110F1}"/>
+              </a:ext>
+            </a:extLst>
+          </p:cNvPr>
+          <p:cNvSpPr>
+            <a:spLocks noGrp="1"/>
+          </p:cNvSpPr>
+          <p:nvPr>
+            <p:ph type="title"/>
+          </p:nvPr>
+        </p:nvSpPr>
+        <p:spPr/>
+        <p:txBody>
+          <a:bodyPr/>
+          <a:lstStyle/>
+          <a:p>
+            <a:r>
+              <a:rPr lang="pt-BR" dirty="0"/>
+              <a:t>Ruído Térmico</a:t>
+            </a:r>
+            <a:br>
+              <a:rPr lang="pt-BR" dirty="0"/>
+            </a:br>
+            <a:r>
+              <a:rPr lang="pt-BR" dirty="0"/>
+              <a:t>Dissipação de Potência</a:t>
+            </a:r>
+          </a:p>
+        </p:txBody>
+      </p:sp>
+      <p:pic>
+        <p:nvPicPr>
+          <p:cNvPr id="4" name="Imagem 3">
+            <a:extLst>
+              <a:ext uri="{FF2B5EF4-FFF2-40B4-BE49-F238E27FC236}">
+                <a16:creationId xmlns:a16="http://schemas.microsoft.com/office/drawing/2014/main" id="{A76767A1-99D7-F90F-884C-E7BB56EFA990}"/>
+              </a:ext>
+            </a:extLst>
+          </p:cNvPr>
+          <p:cNvPicPr>
+            <a:picLocks noChangeAspect="1"/>
+          </p:cNvPicPr>
+          <p:nvPr/>
+        </p:nvPicPr>
+        <p:blipFill>
+          <a:blip r:embed="rId2"/>
+          <a:stretch>
+            <a:fillRect/>
+          </a:stretch>
+        </p:blipFill>
+        <p:spPr>
+          <a:xfrm>
+            <a:off x="1168073" y="1607003"/>
+            <a:ext cx="3876675" cy="4057650"/>
+          </a:xfrm>
+          <a:prstGeom prst="rect">
+            <a:avLst/>
+          </a:prstGeom>
+        </p:spPr>
+      </p:pic>
+      <p:sp>
+        <p:nvSpPr>
+          <p:cNvPr id="6" name="CaixaDeTexto 5">
+            <a:extLst>
+              <a:ext uri="{FF2B5EF4-FFF2-40B4-BE49-F238E27FC236}">
+                <a16:creationId xmlns:a16="http://schemas.microsoft.com/office/drawing/2014/main" id="{0D8A44F0-6CA3-3EBE-1300-AF6572C60A7E}"/>
+              </a:ext>
+            </a:extLst>
+          </p:cNvPr>
+          <p:cNvSpPr txBox="1"/>
+          <p:nvPr/>
+        </p:nvSpPr>
+        <p:spPr>
+          <a:xfrm>
+            <a:off x="1262062" y="3814082"/>
+            <a:ext cx="1844349" cy="769441"/>
+          </a:xfrm>
+          <a:prstGeom prst="rect">
+            <a:avLst/>
+          </a:prstGeom>
+          <a:solidFill>
+            <a:srgbClr val="FFFFFF"/>
+          </a:solidFill>
+        </p:spPr>
+        <p:txBody>
+          <a:bodyPr wrap="square" rtlCol="0">
+            <a:spAutoFit/>
+          </a:bodyPr>
+          <a:lstStyle/>
+          <a:p>
+            <a:pPr algn="r"/>
+            <a:r>
+              <a:rPr lang="pt-BR" sz="4400" b="1" dirty="0"/>
+              <a:t>2</a:t>
+            </a:r>
+            <a:r>
+              <a:rPr lang="pt-BR" sz="4400" b="1" i="1" dirty="0"/>
+              <a:t>kTR</a:t>
+            </a:r>
+            <a:r>
+              <a:rPr lang="pt-BR" sz="4400" b="1" baseline="-25000" dirty="0"/>
+              <a:t>1</a:t>
+            </a:r>
+          </a:p>
+        </p:txBody>
+      </p:sp>
+      <p:pic>
+        <p:nvPicPr>
+          <p:cNvPr id="8" name="Imagem 7">
+            <a:extLst>
+              <a:ext uri="{FF2B5EF4-FFF2-40B4-BE49-F238E27FC236}">
+                <a16:creationId xmlns:a16="http://schemas.microsoft.com/office/drawing/2014/main" id="{B39CC383-9E4E-187D-45D2-E3B8EE1CE636}"/>
+              </a:ext>
+            </a:extLst>
+          </p:cNvPr>
+          <p:cNvPicPr>
+            <a:picLocks noChangeAspect="1"/>
+          </p:cNvPicPr>
+          <p:nvPr/>
+        </p:nvPicPr>
+        <p:blipFill>
+          <a:blip r:embed="rId3"/>
+          <a:stretch>
+            <a:fillRect/>
+          </a:stretch>
+        </p:blipFill>
+        <p:spPr>
+          <a:xfrm>
+            <a:off x="5137926" y="2917058"/>
+            <a:ext cx="1751980" cy="1023884"/>
+          </a:xfrm>
+          <a:prstGeom prst="rect">
+            <a:avLst/>
+          </a:prstGeom>
+        </p:spPr>
+      </p:pic>
+      <p:cxnSp>
+        <p:nvCxnSpPr>
+          <p:cNvPr id="10" name="Conector reto 9">
+            <a:extLst>
+              <a:ext uri="{FF2B5EF4-FFF2-40B4-BE49-F238E27FC236}">
+                <a16:creationId xmlns:a16="http://schemas.microsoft.com/office/drawing/2014/main" id="{CF462E59-9BF0-0D73-84A0-6F6C0360A694}"/>
+              </a:ext>
+            </a:extLst>
+          </p:cNvPr>
+          <p:cNvCxnSpPr/>
+          <p:nvPr/>
+        </p:nvCxnSpPr>
+        <p:spPr>
+          <a:xfrm flipV="1">
+            <a:off x="6411685" y="1905001"/>
+            <a:ext cx="0" cy="1033829"/>
+          </a:xfrm>
+          <a:prstGeom prst="line">
+            <a:avLst/>
+          </a:prstGeom>
+          <a:ln w="34925">
+            <a:solidFill>
+              <a:srgbClr val="0070C0"/>
+            </a:solidFill>
+          </a:ln>
+        </p:spPr>
+        <p:style>
+          <a:lnRef idx="1">
+            <a:schemeClr val="accent1"/>
+          </a:lnRef>
+          <a:fillRef idx="0">
+            <a:schemeClr val="accent1"/>
+          </a:fillRef>
+          <a:effectRef idx="0">
+            <a:schemeClr val="accent1"/>
+          </a:effectRef>
+          <a:fontRef idx="minor">
+            <a:schemeClr val="tx1"/>
+          </a:fontRef>
+        </p:style>
+      </p:cxnSp>
+      <p:cxnSp>
+        <p:nvCxnSpPr>
+          <p:cNvPr id="11" name="Conector reto 10">
+            <a:extLst>
+              <a:ext uri="{FF2B5EF4-FFF2-40B4-BE49-F238E27FC236}">
+                <a16:creationId xmlns:a16="http://schemas.microsoft.com/office/drawing/2014/main" id="{389CC9CC-523D-D5B1-7B8D-133EC8B2417C}"/>
+              </a:ext>
+            </a:extLst>
+          </p:cNvPr>
+          <p:cNvCxnSpPr>
+            <a:cxnSpLocks/>
+          </p:cNvCxnSpPr>
+          <p:nvPr/>
+        </p:nvCxnSpPr>
+        <p:spPr>
+          <a:xfrm flipV="1">
+            <a:off x="6411685" y="3897724"/>
+            <a:ext cx="0" cy="1392733"/>
+          </a:xfrm>
+          <a:prstGeom prst="line">
+            <a:avLst/>
+          </a:prstGeom>
+          <a:ln w="34925">
+            <a:solidFill>
+              <a:srgbClr val="0070C0"/>
+            </a:solidFill>
+          </a:ln>
+        </p:spPr>
+        <p:style>
+          <a:lnRef idx="1">
+            <a:schemeClr val="accent1"/>
+          </a:lnRef>
+          <a:fillRef idx="0">
+            <a:schemeClr val="accent1"/>
+          </a:fillRef>
+          <a:effectRef idx="0">
+            <a:schemeClr val="accent1"/>
+          </a:effectRef>
+          <a:fontRef idx="minor">
+            <a:schemeClr val="tx1"/>
+          </a:fontRef>
+        </p:style>
+      </p:cxnSp>
+      <p:cxnSp>
+        <p:nvCxnSpPr>
+          <p:cNvPr id="14" name="Conector reto 13">
+            <a:extLst>
+              <a:ext uri="{FF2B5EF4-FFF2-40B4-BE49-F238E27FC236}">
+                <a16:creationId xmlns:a16="http://schemas.microsoft.com/office/drawing/2014/main" id="{9CF2DD71-2BF6-25E2-DD24-50D0E1E9D219}"/>
+              </a:ext>
+            </a:extLst>
+          </p:cNvPr>
+          <p:cNvCxnSpPr/>
+          <p:nvPr/>
+        </p:nvCxnSpPr>
+        <p:spPr>
+          <a:xfrm>
+            <a:off x="4724400" y="1905001"/>
+            <a:ext cx="1687285" cy="0"/>
+          </a:xfrm>
+          <a:prstGeom prst="line">
+            <a:avLst/>
+          </a:prstGeom>
+          <a:ln w="31750"/>
+        </p:spPr>
+        <p:style>
+          <a:lnRef idx="1">
+            <a:schemeClr val="accent1"/>
+          </a:lnRef>
+          <a:fillRef idx="0">
+            <a:schemeClr val="accent1"/>
+          </a:fillRef>
+          <a:effectRef idx="0">
+            <a:schemeClr val="accent1"/>
+          </a:effectRef>
+          <a:fontRef idx="minor">
+            <a:schemeClr val="tx1"/>
+          </a:fontRef>
+        </p:style>
+      </p:cxnSp>
+      <p:cxnSp>
+        <p:nvCxnSpPr>
+          <p:cNvPr id="15" name="Conector reto 14">
+            <a:extLst>
+              <a:ext uri="{FF2B5EF4-FFF2-40B4-BE49-F238E27FC236}">
+                <a16:creationId xmlns:a16="http://schemas.microsoft.com/office/drawing/2014/main" id="{E0514ED1-F872-F02E-0FCC-678D3DD9F8CF}"/>
+              </a:ext>
+            </a:extLst>
+          </p:cNvPr>
+          <p:cNvCxnSpPr/>
+          <p:nvPr/>
+        </p:nvCxnSpPr>
+        <p:spPr>
+          <a:xfrm>
+            <a:off x="4735286" y="5236027"/>
+            <a:ext cx="1687285" cy="0"/>
+          </a:xfrm>
+          <a:prstGeom prst="line">
+            <a:avLst/>
+          </a:prstGeom>
+          <a:ln w="31750"/>
+        </p:spPr>
+        <p:style>
+          <a:lnRef idx="1">
+            <a:schemeClr val="accent1"/>
+          </a:lnRef>
+          <a:fillRef idx="0">
+            <a:schemeClr val="accent1"/>
+          </a:fillRef>
+          <a:effectRef idx="0">
+            <a:schemeClr val="accent1"/>
+          </a:effectRef>
+          <a:fontRef idx="minor">
+            <a:schemeClr val="tx1"/>
+          </a:fontRef>
+        </p:style>
+      </p:cxnSp>
+      <mc:AlternateContent xmlns:mc="http://schemas.openxmlformats.org/markup-compatibility/2006">
+        <mc:Choice xmlns:a14="http://schemas.microsoft.com/office/drawing/2010/main" Requires="a14">
+          <p:sp>
+            <p:nvSpPr>
+              <p:cNvPr id="16" name="CaixaDeTexto 15">
+                <a:extLst>
+                  <a:ext uri="{FF2B5EF4-FFF2-40B4-BE49-F238E27FC236}">
+                    <a16:creationId xmlns:a16="http://schemas.microsoft.com/office/drawing/2014/main" id="{F82416F9-6E7D-C98D-B2B4-85FAADF0E495}"/>
+                  </a:ext>
+                </a:extLst>
+              </p:cNvPr>
+              <p:cNvSpPr txBox="1"/>
+              <p:nvPr/>
+            </p:nvSpPr>
+            <p:spPr>
+              <a:xfrm>
+                <a:off x="7293429" y="1905001"/>
+                <a:ext cx="4463141" cy="2659702"/>
+              </a:xfrm>
+              <a:prstGeom prst="rect">
+                <a:avLst/>
+              </a:prstGeom>
+              <a:noFill/>
+            </p:spPr>
+            <p:txBody>
+              <a:bodyPr wrap="square" rtlCol="0">
+                <a:spAutoFit/>
+              </a:bodyPr>
+              <a:lstStyle/>
+              <a:p>
+                <a:r>
+                  <a:rPr lang="pt-BR" sz="2800" dirty="0"/>
+                  <a:t>A carga casada maximiza a transferência de potência.</a:t>
+                </a:r>
+              </a:p>
+              <a:p>
+                <a:r>
+                  <a:rPr lang="pt-BR" sz="2800" dirty="0"/>
+                  <a:t>A potência dissipada no resistor casado tem PSD</a:t>
+                </a:r>
+              </a:p>
+              <a:p>
+                <a14:m>
+                  <m:oMathPara xmlns:m="http://schemas.openxmlformats.org/officeDocument/2006/math">
+                    <m:oMath>
+                      <m:sSub>
+                        <m:sSubPr>
+                          <m:ctrlPr>
+                            <a:rPr lang="pt-BR" sz="2800" b="0" i="1" smtClean="0">
+                              <a:latin typeface="Cambria Math" panose="02040503050406030204" pitchFamily="18" charset="0"/>
+                            </a:rPr>
+                          </m:ctrlPr>
+                        </m:sSubPr>
+                        <m:e>
+                          <m:r>
+                            <a:rPr lang="pt-BR" sz="2800" b="0" i="1" smtClean="0">
+                              <a:latin typeface="Cambria Math" panose="02040503050406030204" pitchFamily="18" charset="0"/>
+                            </a:rPr>
+                            <m:t>𝑆</m:t>
+                          </m:r>
+                        </m:e>
+                        <m:sub>
+                          <m:r>
+                            <a:rPr lang="pt-BR" sz="2800" b="0" i="1" smtClean="0">
+                              <a:latin typeface="Cambria Math" panose="02040503050406030204" pitchFamily="18" charset="0"/>
+                            </a:rPr>
+                            <m:t>𝑥</m:t>
+                          </m:r>
+                        </m:sub>
+                      </m:sSub>
+                      <m:d>
+                        <m:dPr>
+                          <m:ctrlPr>
+                            <a:rPr lang="pt-BR" sz="2800" b="0" i="1" smtClean="0">
+                              <a:latin typeface="Cambria Math" panose="02040503050406030204" pitchFamily="18" charset="0"/>
+                            </a:rPr>
+                          </m:ctrlPr>
+                        </m:dPr>
+                        <m:e>
+                          <m:r>
+                            <a:rPr lang="pt-BR" sz="2800" b="0" i="1" smtClean="0">
+                              <a:latin typeface="Cambria Math" panose="02040503050406030204" pitchFamily="18" charset="0"/>
+                            </a:rPr>
+                            <m:t>𝑓</m:t>
+                          </m:r>
+                        </m:e>
+                      </m:d>
+                      <m:r>
+                        <a:rPr lang="pt-BR" sz="2800" b="0" i="1" smtClean="0">
+                          <a:latin typeface="Cambria Math" panose="02040503050406030204" pitchFamily="18" charset="0"/>
+                        </a:rPr>
+                        <m:t>=</m:t>
+                      </m:r>
+                      <m:f>
+                        <m:fPr>
+                          <m:ctrlPr>
+                            <a:rPr lang="pt-BR" sz="2800" b="0" i="1" smtClean="0">
+                              <a:latin typeface="Cambria Math" panose="02040503050406030204" pitchFamily="18" charset="0"/>
+                            </a:rPr>
+                          </m:ctrlPr>
+                        </m:fPr>
+                        <m:num>
+                          <m:r>
+                            <a:rPr lang="pt-BR" sz="2800" b="0" i="1" smtClean="0">
+                              <a:latin typeface="Cambria Math" panose="02040503050406030204" pitchFamily="18" charset="0"/>
+                            </a:rPr>
+                            <m:t>𝑘𝑇</m:t>
+                          </m:r>
+                        </m:num>
+                        <m:den>
+                          <m:r>
+                            <a:rPr lang="pt-BR" sz="2800" b="0" i="1" smtClean="0">
+                              <a:latin typeface="Cambria Math" panose="02040503050406030204" pitchFamily="18" charset="0"/>
+                            </a:rPr>
+                            <m:t>2</m:t>
+                          </m:r>
+                        </m:den>
+                      </m:f>
+                      <m:f>
+                        <m:fPr>
+                          <m:ctrlPr>
+                            <a:rPr lang="pt-BR" sz="2800" b="0" i="0" smtClean="0">
+                              <a:latin typeface="Cambria Math" panose="02040503050406030204" pitchFamily="18" charset="0"/>
+                            </a:rPr>
+                          </m:ctrlPr>
+                        </m:fPr>
+                        <m:num>
+                          <m:r>
+                            <m:rPr>
+                              <m:sty m:val="p"/>
+                            </m:rPr>
+                            <a:rPr lang="pt-BR" sz="2800" b="0" i="0" smtClean="0">
+                              <a:latin typeface="Cambria Math" panose="02040503050406030204" pitchFamily="18" charset="0"/>
+                            </a:rPr>
+                            <m:t>W</m:t>
+                          </m:r>
+                        </m:num>
+                        <m:den>
+                          <m:r>
+                            <m:rPr>
+                              <m:sty m:val="p"/>
+                            </m:rPr>
+                            <a:rPr lang="pt-BR" sz="2800" b="0" i="0" smtClean="0">
+                              <a:latin typeface="Cambria Math" panose="02040503050406030204" pitchFamily="18" charset="0"/>
+                            </a:rPr>
+                            <m:t>Hz</m:t>
+                          </m:r>
+                        </m:den>
+                      </m:f>
+                    </m:oMath>
+                  </m:oMathPara>
+                </a14:m>
+                <a:endParaRPr lang="pt-BR" sz="2800" dirty="0"/>
+              </a:p>
+            </p:txBody>
+          </p:sp>
+        </mc:Choice>
+        <mc:Fallback>
+          <p:sp>
+            <p:nvSpPr>
+              <p:cNvPr id="16" name="CaixaDeTexto 15">
+                <a:extLst>
+                  <a:ext uri="{FF2B5EF4-FFF2-40B4-BE49-F238E27FC236}">
+                    <a16:creationId xmlns:a16="http://schemas.microsoft.com/office/drawing/2014/main" id="{F82416F9-6E7D-C98D-B2B4-85FAADF0E495}"/>
+                  </a:ext>
+                </a:extLst>
+              </p:cNvPr>
+              <p:cNvSpPr txBox="1">
+                <a:spLocks noRot="1" noChangeAspect="1" noMove="1" noResize="1" noEditPoints="1" noAdjustHandles="1" noChangeArrowheads="1" noChangeShapeType="1" noTextEdit="1"/>
+              </p:cNvSpPr>
+              <p:nvPr/>
+            </p:nvSpPr>
+            <p:spPr>
+              <a:xfrm>
+                <a:off x="7293429" y="1905001"/>
+                <a:ext cx="4463141" cy="2659702"/>
+              </a:xfrm>
+              <a:prstGeom prst="rect">
+                <a:avLst/>
+              </a:prstGeom>
+              <a:blipFill>
+                <a:blip r:embed="rId4"/>
+                <a:stretch>
+                  <a:fillRect l="-2729" t="-2294"/>
+                </a:stretch>
+              </a:blipFill>
+            </p:spPr>
+            <p:txBody>
+              <a:bodyPr/>
+              <a:lstStyle/>
+              <a:p>
+                <a:r>
+                  <a:rPr lang="pt-BR">
+                    <a:noFill/>
+                  </a:rPr>
+                  <a:t> </a:t>
+                </a:r>
+              </a:p>
+            </p:txBody>
+          </p:sp>
+        </mc:Fallback>
+      </mc:AlternateContent>
+    </p:spTree>
+    <p:extLst>
+      <p:ext uri="{BB962C8B-B14F-4D97-AF65-F5344CB8AC3E}">
+        <p14:creationId xmlns:p14="http://schemas.microsoft.com/office/powerpoint/2010/main" val="2420068719"/>
+      </p:ext>
+    </p:extLst>
+  </p:cSld>
+  <p:clrMapOvr>
+    <a:masterClrMapping/>
+  </p:clrMapOvr>
+  <mc:AlternateContent xmlns:mc="http://schemas.openxmlformats.org/markup-compatibility/2006" xmlns:p14="http://schemas.microsoft.com/office/powerpoint/2010/main">
+    <mc:Choice Requires="p14">
+      <p:transition spd="med" p14:dur="700">
+        <p:fade/>
+      </p:transition>
+    </mc:Choice>
+    <mc:Fallback xmlns="">
+      <p:transition spd="med">
+        <p:fade/>
+      </p:transition>
+    </mc:Fallback>
+  </mc:AlternateContent>
+</p:sld>
+</file>
+
+<file path=ppt/slides/slide35.xml><?xml version="1.0" encoding="utf-8"?>
+<p:sld xmlns:a="http://schemas.openxmlformats.org/drawingml/2006/main" xmlns:r="http://schemas.openxmlformats.org/officeDocument/2006/relationships" xmlns:p="http://schemas.openxmlformats.org/presentationml/2006/main">
+  <p:cSld>
+    <p:spTree>
+      <p:nvGrpSpPr>
+        <p:cNvPr id="1" name=""/>
+        <p:cNvGrpSpPr/>
+        <p:nvPr/>
+      </p:nvGrpSpPr>
+      <p:grpSpPr>
+        <a:xfrm>
+          <a:off x="0" y="0"/>
+          <a:ext cx="0" cy="0"/>
+          <a:chOff x="0" y="0"/>
+          <a:chExt cx="0" cy="0"/>
+        </a:xfrm>
+      </p:grpSpPr>
+      <p:sp>
+        <p:nvSpPr>
+          <p:cNvPr id="2" name="Título 1">
+            <a:extLst>
+              <a:ext uri="{FF2B5EF4-FFF2-40B4-BE49-F238E27FC236}">
+                <a16:creationId xmlns:a16="http://schemas.microsoft.com/office/drawing/2014/main" id="{EEDE877C-C34A-CA4F-C15A-3D4DA7AAD831}"/>
+              </a:ext>
+            </a:extLst>
+          </p:cNvPr>
+          <p:cNvSpPr>
+            <a:spLocks noGrp="1"/>
+          </p:cNvSpPr>
+          <p:nvPr>
+            <p:ph type="title"/>
+          </p:nvPr>
+        </p:nvSpPr>
+        <p:spPr/>
+        <p:txBody>
+          <a:bodyPr/>
+          <a:lstStyle/>
+          <a:p>
+            <a:r>
+              <a:rPr lang="pt-BR" dirty="0"/>
+              <a:t>Ruído Térmico</a:t>
+            </a:r>
+          </a:p>
+        </p:txBody>
+      </p:sp>
+      <mc:AlternateContent xmlns:mc="http://schemas.openxmlformats.org/markup-compatibility/2006">
+        <mc:Choice xmlns:a14="http://schemas.microsoft.com/office/drawing/2010/main" Requires="a14">
+          <p:sp>
+            <p:nvSpPr>
+              <p:cNvPr id="3" name="Espaço Reservado para Conteúdo 2">
+                <a:extLst>
+                  <a:ext uri="{FF2B5EF4-FFF2-40B4-BE49-F238E27FC236}">
+                    <a16:creationId xmlns:a16="http://schemas.microsoft.com/office/drawing/2014/main" id="{112B8568-630A-0CAB-AE17-9C9CB86454D8}"/>
+                  </a:ext>
+                </a:extLst>
+              </p:cNvPr>
+              <p:cNvSpPr>
+                <a:spLocks noGrp="1"/>
+              </p:cNvSpPr>
+              <p:nvPr>
+                <p:ph idx="1"/>
+              </p:nvPr>
+            </p:nvSpPr>
+            <p:spPr/>
+            <p:txBody>
+              <a:bodyPr/>
+              <a:lstStyle/>
+              <a:p>
+                <a:r>
+                  <a:rPr lang="pt-BR" dirty="0"/>
+                  <a:t>Em receptores de comunicações, considera-se uma carga casada com temperatura de 300 K (26,85º C)</a:t>
+                </a:r>
+              </a:p>
+              <a:p>
+                <a:r>
+                  <a:rPr lang="pt-BR" dirty="0"/>
+                  <a:t>Neste caso a potência do ruído é dada por</a:t>
+                </a:r>
+              </a:p>
+              <a:p>
+                <a:pPr marL="0" indent="0">
+                  <a:buNone/>
+                </a:pPr>
+                <a14:m>
+                  <m:oMathPara xmlns:m="http://schemas.openxmlformats.org/officeDocument/2006/math">
+                    <m:oMathParaPr>
+                      <m:jc m:val="center"/>
+                    </m:oMathParaPr>
+                    <m:oMath>
+                      <m:sSub>
+                        <m:sSubPr>
+                          <m:ctrlPr>
+                            <a:rPr lang="pt-BR" b="0" i="1" smtClean="0">
+                              <a:latin typeface="Cambria Math" panose="02040503050406030204" pitchFamily="18" charset="0"/>
+                            </a:rPr>
+                          </m:ctrlPr>
+                        </m:sSubPr>
+                        <m:e>
+                          <m:r>
+                            <a:rPr lang="pt-BR" b="0" i="1" smtClean="0">
+                              <a:latin typeface="Cambria Math" panose="02040503050406030204" pitchFamily="18" charset="0"/>
+                            </a:rPr>
+                            <m:t>𝑃</m:t>
+                          </m:r>
+                        </m:e>
+                        <m:sub>
+                          <m:r>
+                            <a:rPr lang="pt-BR" b="0" i="1" smtClean="0">
+                              <a:latin typeface="Cambria Math" panose="02040503050406030204" pitchFamily="18" charset="0"/>
+                            </a:rPr>
+                            <m:t>𝑛</m:t>
+                          </m:r>
+                        </m:sub>
+                      </m:sSub>
+                      <m:r>
+                        <a:rPr lang="pt-BR" b="0" i="1" smtClean="0">
+                          <a:latin typeface="Cambria Math" panose="02040503050406030204" pitchFamily="18" charset="0"/>
+                        </a:rPr>
+                        <m:t>=2×</m:t>
+                      </m:r>
+                      <m:sSup>
+                        <m:sSupPr>
+                          <m:ctrlPr>
+                            <a:rPr lang="pt-BR" b="0" i="1" smtClean="0">
+                              <a:latin typeface="Cambria Math" panose="02040503050406030204" pitchFamily="18" charset="0"/>
+                            </a:rPr>
+                          </m:ctrlPr>
+                        </m:sSupPr>
+                        <m:e>
+                          <m:r>
+                            <a:rPr lang="pt-BR" b="0" i="1" smtClean="0">
+                              <a:latin typeface="Cambria Math" panose="02040503050406030204" pitchFamily="18" charset="0"/>
+                            </a:rPr>
+                            <m:t>10</m:t>
+                          </m:r>
+                        </m:e>
+                        <m:sup>
+                          <m:r>
+                            <a:rPr lang="pt-BR" b="0" i="1" smtClean="0">
+                              <a:latin typeface="Cambria Math" panose="02040503050406030204" pitchFamily="18" charset="0"/>
+                            </a:rPr>
+                            <m:t>−21</m:t>
+                          </m:r>
+                        </m:sup>
+                      </m:sSup>
+                      <m:f>
+                        <m:fPr>
+                          <m:ctrlPr>
+                            <a:rPr lang="pt-BR" b="0" i="0" smtClean="0">
+                              <a:latin typeface="Cambria Math" panose="02040503050406030204" pitchFamily="18" charset="0"/>
+                            </a:rPr>
+                          </m:ctrlPr>
+                        </m:fPr>
+                        <m:num>
+                          <m:r>
+                            <m:rPr>
+                              <m:sty m:val="p"/>
+                            </m:rPr>
+                            <a:rPr lang="pt-BR" b="0" i="0" smtClean="0">
+                              <a:latin typeface="Cambria Math" panose="02040503050406030204" pitchFamily="18" charset="0"/>
+                            </a:rPr>
+                            <m:t>W</m:t>
+                          </m:r>
+                        </m:num>
+                        <m:den>
+                          <m:r>
+                            <m:rPr>
+                              <m:sty m:val="p"/>
+                            </m:rPr>
+                            <a:rPr lang="pt-BR" b="0" i="0" smtClean="0">
+                              <a:latin typeface="Cambria Math" panose="02040503050406030204" pitchFamily="18" charset="0"/>
+                            </a:rPr>
+                            <m:t>Hz</m:t>
+                          </m:r>
+                        </m:den>
+                      </m:f>
+                      <m:r>
+                        <a:rPr lang="pt-BR" b="0" i="1" smtClean="0">
+                          <a:latin typeface="Cambria Math" panose="02040503050406030204" pitchFamily="18" charset="0"/>
+                        </a:rPr>
+                        <m:t>×2</m:t>
+                      </m:r>
+                      <m:r>
+                        <a:rPr lang="pt-BR" b="0" i="1" smtClean="0">
+                          <a:latin typeface="Cambria Math" panose="02040503050406030204" pitchFamily="18" charset="0"/>
+                        </a:rPr>
+                        <m:t>𝐵</m:t>
+                      </m:r>
+                      <m:r>
+                        <a:rPr lang="pt-BR" b="0" i="1" smtClean="0">
+                          <a:latin typeface="Cambria Math" panose="02040503050406030204" pitchFamily="18" charset="0"/>
+                        </a:rPr>
+                        <m:t>=−174 </m:t>
+                      </m:r>
+                      <m:r>
+                        <m:rPr>
+                          <m:sty m:val="p"/>
+                        </m:rPr>
+                        <a:rPr lang="pt-BR">
+                          <a:latin typeface="Cambria Math" panose="02040503050406030204" pitchFamily="18" charset="0"/>
+                        </a:rPr>
+                        <m:t>dBm</m:t>
+                      </m:r>
+                      <m:r>
+                        <a:rPr lang="pt-BR" i="1">
+                          <a:latin typeface="Cambria Math" panose="02040503050406030204" pitchFamily="18" charset="0"/>
+                        </a:rPr>
+                        <m:t> +10</m:t>
+                      </m:r>
+                      <m:func>
+                        <m:funcPr>
+                          <m:ctrlPr>
+                            <a:rPr lang="pt-BR" i="1">
+                              <a:latin typeface="Cambria Math" panose="02040503050406030204" pitchFamily="18" charset="0"/>
+                            </a:rPr>
+                          </m:ctrlPr>
+                        </m:funcPr>
+                        <m:fName>
+                          <m:sSub>
+                            <m:sSubPr>
+                              <m:ctrlPr>
+                                <a:rPr lang="pt-BR">
+                                  <a:latin typeface="Cambria Math" panose="02040503050406030204" pitchFamily="18" charset="0"/>
+                                </a:rPr>
+                              </m:ctrlPr>
+                            </m:sSubPr>
+                            <m:e>
+                              <m:r>
+                                <m:rPr>
+                                  <m:sty m:val="p"/>
+                                </m:rPr>
+                                <a:rPr lang="pt-BR">
+                                  <a:latin typeface="Cambria Math" panose="02040503050406030204" pitchFamily="18" charset="0"/>
+                                </a:rPr>
+                                <m:t>log</m:t>
+                              </m:r>
+                            </m:e>
+                            <m:sub>
+                              <m:r>
+                                <a:rPr lang="pt-BR" i="1">
+                                  <a:latin typeface="Cambria Math" panose="02040503050406030204" pitchFamily="18" charset="0"/>
+                                </a:rPr>
+                                <m:t>10</m:t>
+                              </m:r>
+                            </m:sub>
+                          </m:sSub>
+                        </m:fName>
+                        <m:e>
+                          <m:r>
+                            <a:rPr lang="pt-BR" i="1">
+                              <a:latin typeface="Cambria Math" panose="02040503050406030204" pitchFamily="18" charset="0"/>
+                            </a:rPr>
+                            <m:t>𝐵</m:t>
+                          </m:r>
+                        </m:e>
+                      </m:func>
+                    </m:oMath>
+                  </m:oMathPara>
+                </a14:m>
+                <a:endParaRPr lang="pt-BR" dirty="0"/>
+              </a:p>
+              <a:p>
+                <a:pPr marL="0" indent="0">
+                  <a:buNone/>
+                </a:pPr>
+                <a:endParaRPr lang="pt-BR" dirty="0"/>
+              </a:p>
+            </p:txBody>
+          </p:sp>
+        </mc:Choice>
+        <mc:Fallback>
+          <p:sp>
+            <p:nvSpPr>
+              <p:cNvPr id="3" name="Espaço Reservado para Conteúdo 2">
+                <a:extLst>
+                  <a:ext uri="{FF2B5EF4-FFF2-40B4-BE49-F238E27FC236}">
+                    <a16:creationId xmlns:a16="http://schemas.microsoft.com/office/drawing/2014/main" id="{112B8568-630A-0CAB-AE17-9C9CB86454D8}"/>
+                  </a:ext>
+                </a:extLst>
+              </p:cNvPr>
+              <p:cNvSpPr>
+                <a:spLocks noGrp="1" noRot="1" noChangeAspect="1" noMove="1" noResize="1" noEditPoints="1" noAdjustHandles="1" noChangeArrowheads="1" noChangeShapeType="1" noTextEdit="1"/>
+              </p:cNvSpPr>
+              <p:nvPr>
+                <p:ph idx="1"/>
+              </p:nvPr>
+            </p:nvSpPr>
+            <p:spPr>
+              <a:blipFill>
+                <a:blip r:embed="rId2"/>
+                <a:stretch>
+                  <a:fillRect l="-1043" t="-2381" r="-754"/>
+                </a:stretch>
+              </a:blipFill>
+            </p:spPr>
+            <p:txBody>
+              <a:bodyPr/>
+              <a:lstStyle/>
+              <a:p>
+                <a:r>
+                  <a:rPr lang="pt-BR">
+                    <a:noFill/>
+                  </a:rPr>
+                  <a:t> </a:t>
+                </a:r>
+              </a:p>
+            </p:txBody>
+          </p:sp>
+        </mc:Fallback>
+      </mc:AlternateContent>
+    </p:spTree>
+    <p:extLst>
+      <p:ext uri="{BB962C8B-B14F-4D97-AF65-F5344CB8AC3E}">
+        <p14:creationId xmlns:p14="http://schemas.microsoft.com/office/powerpoint/2010/main" val="1803569120"/>
+      </p:ext>
+    </p:extLst>
+  </p:cSld>
+  <p:clrMapOvr>
+    <a:masterClrMapping/>
+  </p:clrMapOvr>
+  <mc:AlternateContent xmlns:mc="http://schemas.openxmlformats.org/markup-compatibility/2006" xmlns:p14="http://schemas.microsoft.com/office/powerpoint/2010/main">
+    <mc:Choice Requires="p14">
+      <p:transition spd="med" p14:dur="700">
+        <p:fade/>
+      </p:transition>
+    </mc:Choice>
+    <mc:Fallback xmlns="">
+      <p:transition spd="med">
+        <p:fade/>
+      </p:transition>
+    </mc:Fallback>
+  </mc:AlternateContent>
+</p:sld>
+</file>
+
+<file path=ppt/slides/slide36.xml><?xml version="1.0" encoding="utf-8"?>
+<p:sld xmlns:a="http://schemas.openxmlformats.org/drawingml/2006/main" xmlns:r="http://schemas.openxmlformats.org/officeDocument/2006/relationships" xmlns:p="http://schemas.openxmlformats.org/presentationml/2006/main">
+  <p:cSld>
+    <p:spTree>
+      <p:nvGrpSpPr>
+        <p:cNvPr id="1" name=""/>
+        <p:cNvGrpSpPr/>
+        <p:nvPr/>
+      </p:nvGrpSpPr>
+      <p:grpSpPr>
+        <a:xfrm>
+          <a:off x="0" y="0"/>
+          <a:ext cx="0" cy="0"/>
+          <a:chOff x="0" y="0"/>
+          <a:chExt cx="0" cy="0"/>
+        </a:xfrm>
+      </p:grpSpPr>
+      <p:sp>
+        <p:nvSpPr>
+          <p:cNvPr id="2" name="Título 1">
+            <a:extLst>
+              <a:ext uri="{FF2B5EF4-FFF2-40B4-BE49-F238E27FC236}">
                 <a16:creationId xmlns:a16="http://schemas.microsoft.com/office/drawing/2014/main" id="{B114857D-D9D0-D4EE-6BD1-9E0262B7F0E6}"/>
               </a:ext>
             </a:extLst>
@@ -15332,8 +16541,8 @@
           </a:p>
         </p:txBody>
       </p:sp>
-      <mc:AlternateContent xmlns:mc="http://schemas.openxmlformats.org/markup-compatibility/2006">
-        <mc:Choice xmlns:a14="http://schemas.microsoft.com/office/drawing/2010/main" Requires="a14">
+      <mc:AlternateContent xmlns:mc="http://schemas.openxmlformats.org/markup-compatibility/2006" xmlns:a14="http://schemas.microsoft.com/office/drawing/2010/main">
+        <mc:Choice Requires="a14">
           <p:sp>
             <p:nvSpPr>
               <p:cNvPr id="3" name="Espaço Reservado para Conteúdo 2">
@@ -15582,7 +16791,7 @@
             </p:txBody>
           </p:sp>
         </mc:Choice>
-        <mc:Fallback>
+        <mc:Fallback xmlns="">
           <p:sp>
             <p:nvSpPr>
               <p:cNvPr id="3" name="Espaço Reservado para Conteúdo 2">
@@ -15647,7 +16856,7 @@
 </p:sld>
 </file>
 
-<file path=ppt/slides/slide34.xml><?xml version="1.0" encoding="utf-8"?>
+<file path=ppt/slides/slide37.xml><?xml version="1.0" encoding="utf-8"?>
 <p:sld xmlns:a="http://schemas.openxmlformats.org/drawingml/2006/main" xmlns:r="http://schemas.openxmlformats.org/officeDocument/2006/relationships" xmlns:p="http://schemas.openxmlformats.org/presentationml/2006/main">
   <p:cSld>
     <p:spTree>
@@ -15766,7 +16975,7 @@
 </p:sld>
 </file>
 
-<file path=ppt/slides/slide35.xml><?xml version="1.0" encoding="utf-8"?>
+<file path=ppt/slides/slide38.xml><?xml version="1.0" encoding="utf-8"?>
 <p:sld xmlns:a="http://schemas.openxmlformats.org/drawingml/2006/main" xmlns:r="http://schemas.openxmlformats.org/officeDocument/2006/relationships" xmlns:p="http://schemas.openxmlformats.org/presentationml/2006/main">
   <p:cSld>
     <p:spTree>
@@ -15811,8 +17020,8 @@
           </a:p>
         </p:txBody>
       </p:sp>
-      <mc:AlternateContent xmlns:mc="http://schemas.openxmlformats.org/markup-compatibility/2006">
-        <mc:Choice xmlns:a14="http://schemas.microsoft.com/office/drawing/2010/main" Requires="a14">
+      <mc:AlternateContent xmlns:mc="http://schemas.openxmlformats.org/markup-compatibility/2006" xmlns:a14="http://schemas.microsoft.com/office/drawing/2010/main">
+        <mc:Choice Requires="a14">
           <p:sp>
             <p:nvSpPr>
               <p:cNvPr id="3" name="Espaço Reservado para Conteúdo 2">
@@ -16046,7 +17255,7 @@
             </p:txBody>
           </p:sp>
         </mc:Choice>
-        <mc:Fallback>
+        <mc:Fallback xmlns="">
           <p:sp>
             <p:nvSpPr>
               <p:cNvPr id="3" name="Espaço Reservado para Conteúdo 2">
@@ -16111,7 +17320,7 @@
 </p:sld>
 </file>
 
-<file path=ppt/slides/slide36.xml><?xml version="1.0" encoding="utf-8"?>
+<file path=ppt/slides/slide39.xml><?xml version="1.0" encoding="utf-8"?>
 <p:sld xmlns:a="http://schemas.openxmlformats.org/drawingml/2006/main" xmlns:r="http://schemas.openxmlformats.org/officeDocument/2006/relationships" xmlns:p="http://schemas.openxmlformats.org/presentationml/2006/main">
   <p:cSld>
     <p:spTree>
@@ -16269,8 +17478,8 @@
           </a:p>
         </p:txBody>
       </p:sp>
-      <mc:AlternateContent xmlns:mc="http://schemas.openxmlformats.org/markup-compatibility/2006">
-        <mc:Choice xmlns:a14="http://schemas.microsoft.com/office/drawing/2010/main" Requires="a14">
+      <mc:AlternateContent xmlns:mc="http://schemas.openxmlformats.org/markup-compatibility/2006" xmlns:a14="http://schemas.microsoft.com/office/drawing/2010/main">
+        <mc:Choice Requires="a14">
           <p:sp>
             <p:nvSpPr>
               <p:cNvPr id="3" name="Espaço Reservado para Conteúdo 2">
@@ -16751,7 +17960,7 @@
             </p:txBody>
           </p:sp>
         </mc:Choice>
-        <mc:Fallback>
+        <mc:Fallback xmlns="">
           <p:sp>
             <p:nvSpPr>
               <p:cNvPr id="3" name="Espaço Reservado para Conteúdo 2">
@@ -16942,8 +18151,8 @@
           </a:p>
         </p:txBody>
       </p:sp>
-      <mc:AlternateContent xmlns:mc="http://schemas.openxmlformats.org/markup-compatibility/2006">
-        <mc:Choice xmlns:a14="http://schemas.microsoft.com/office/drawing/2010/main" Requires="a14">
+      <mc:AlternateContent xmlns:mc="http://schemas.openxmlformats.org/markup-compatibility/2006" xmlns:a14="http://schemas.microsoft.com/office/drawing/2010/main">
+        <mc:Choice Requires="a14">
           <p:sp>
             <p:nvSpPr>
               <p:cNvPr id="5" name="CaixaDeTexto 4">
@@ -17338,7 +18547,7 @@
             </p:txBody>
           </p:sp>
         </mc:Choice>
-        <mc:Fallback>
+        <mc:Fallback xmlns="">
           <p:sp>
             <p:nvSpPr>
               <p:cNvPr id="5" name="CaixaDeTexto 4">
@@ -17383,8 +18592,8 @@
           </p:sp>
         </mc:Fallback>
       </mc:AlternateContent>
-      <mc:AlternateContent xmlns:mc="http://schemas.openxmlformats.org/markup-compatibility/2006">
-        <mc:Choice xmlns:a14="http://schemas.microsoft.com/office/drawing/2010/main" Requires="a14">
+      <mc:AlternateContent xmlns:mc="http://schemas.openxmlformats.org/markup-compatibility/2006" xmlns:a14="http://schemas.microsoft.com/office/drawing/2010/main">
+        <mc:Choice Requires="a14">
           <p:sp>
             <p:nvSpPr>
               <p:cNvPr id="7" name="CaixaDeTexto 6">
@@ -17659,7 +18868,7 @@
             </p:txBody>
           </p:sp>
         </mc:Choice>
-        <mc:Fallback>
+        <mc:Fallback xmlns="">
           <p:sp>
             <p:nvSpPr>
               <p:cNvPr id="7" name="CaixaDeTexto 6">
@@ -17704,8 +18913,8 @@
           </p:sp>
         </mc:Fallback>
       </mc:AlternateContent>
-      <mc:AlternateContent xmlns:mc="http://schemas.openxmlformats.org/markup-compatibility/2006">
-        <mc:Choice xmlns:a14="http://schemas.microsoft.com/office/drawing/2010/main" Requires="a14">
+      <mc:AlternateContent xmlns:mc="http://schemas.openxmlformats.org/markup-compatibility/2006" xmlns:a14="http://schemas.microsoft.com/office/drawing/2010/main">
+        <mc:Choice Requires="a14">
           <p:sp>
             <p:nvSpPr>
               <p:cNvPr id="9" name="CaixaDeTexto 8">
@@ -17747,7 +18956,7 @@
                       <m:func>
                         <m:funcPr>
                           <m:ctrlPr>
-                            <a:rPr lang="pt-BR" sz="3200" b="0" i="0" smtClean="0">
+                            <a:rPr lang="pt-BR" sz="3200" b="0" i="1" smtClean="0">
                               <a:latin typeface="Cambria Math" panose="02040503050406030204" pitchFamily="18" charset="0"/>
                             </a:rPr>
                           </m:ctrlPr>
@@ -17806,13 +19015,12 @@
                 <a:endParaRPr lang="pt-BR" sz="3200" b="0" dirty="0"/>
               </a:p>
               <a:p>
-                <a:pPr/>
                 <a:endParaRPr lang="pt-BR" dirty="0"/>
               </a:p>
             </p:txBody>
           </p:sp>
         </mc:Choice>
-        <mc:Fallback>
+        <mc:Fallback xmlns="">
           <p:sp>
             <p:nvSpPr>
               <p:cNvPr id="9" name="CaixaDeTexto 8">
@@ -17857,8 +19065,8 @@
           </p:sp>
         </mc:Fallback>
       </mc:AlternateContent>
-      <mc:AlternateContent xmlns:mc="http://schemas.openxmlformats.org/markup-compatibility/2006">
-        <mc:Choice xmlns:a14="http://schemas.microsoft.com/office/drawing/2010/main" Requires="a14">
+      <mc:AlternateContent xmlns:mc="http://schemas.openxmlformats.org/markup-compatibility/2006" xmlns:a14="http://schemas.microsoft.com/office/drawing/2010/main">
+        <mc:Choice Requires="a14">
           <p:sp>
             <p:nvSpPr>
               <p:cNvPr id="11" name="CaixaDeTexto 10">
@@ -17900,7 +19108,7 @@
                       <m:func>
                         <m:funcPr>
                           <m:ctrlPr>
-                            <a:rPr lang="pt-BR" sz="3200" b="0" i="0" smtClean="0">
+                            <a:rPr lang="pt-BR" sz="3200" b="0" i="1" smtClean="0">
                               <a:latin typeface="Cambria Math" panose="02040503050406030204" pitchFamily="18" charset="0"/>
                             </a:rPr>
                           </m:ctrlPr>
@@ -17961,7 +19169,7 @@
             </p:txBody>
           </p:sp>
         </mc:Choice>
-        <mc:Fallback>
+        <mc:Fallback xmlns="">
           <p:sp>
             <p:nvSpPr>
               <p:cNvPr id="11" name="CaixaDeTexto 10">
@@ -18076,8 +19284,8 @@
           </a:p>
         </p:txBody>
       </p:sp>
-      <mc:AlternateContent xmlns:mc="http://schemas.openxmlformats.org/markup-compatibility/2006">
-        <mc:Choice xmlns:a14="http://schemas.microsoft.com/office/drawing/2010/main" Requires="a14">
+      <mc:AlternateContent xmlns:mc="http://schemas.openxmlformats.org/markup-compatibility/2006" xmlns:a14="http://schemas.microsoft.com/office/drawing/2010/main">
+        <mc:Choice Requires="a14">
           <p:sp>
             <p:nvSpPr>
               <p:cNvPr id="3" name="Espaço Reservado para Conteúdo 2">
@@ -18135,7 +19343,7 @@
                     <m:func>
                       <m:funcPr>
                         <m:ctrlPr>
-                          <a:rPr lang="pt-BR" b="0" i="0" smtClean="0">
+                          <a:rPr lang="pt-BR" b="0" i="1" smtClean="0">
                             <a:latin typeface="Cambria Math" panose="02040503050406030204" pitchFamily="18" charset="0"/>
                           </a:rPr>
                         </m:ctrlPr>
@@ -18249,7 +19457,7 @@
                     <m:func>
                       <m:funcPr>
                         <m:ctrlPr>
-                          <a:rPr lang="pt-BR" b="0" i="1" smtClean="0">
+                          <a:rPr lang="pt-BR" i="1">
                             <a:latin typeface="Cambria Math" panose="02040503050406030204" pitchFamily="18" charset="0"/>
                           </a:rPr>
                         </m:ctrlPr>
@@ -18422,7 +19630,7 @@
             </p:txBody>
           </p:sp>
         </mc:Choice>
-        <mc:Fallback>
+        <mc:Fallback xmlns="">
           <p:sp>
             <p:nvSpPr>
               <p:cNvPr id="3" name="Espaço Reservado para Conteúdo 2">
@@ -19185,8 +20393,8 @@
           </a:fontRef>
         </p:style>
       </p:cxnSp>
-      <mc:AlternateContent xmlns:mc="http://schemas.openxmlformats.org/markup-compatibility/2006">
-        <mc:Choice xmlns:a14="http://schemas.microsoft.com/office/drawing/2010/main" Requires="a14">
+      <mc:AlternateContent xmlns:mc="http://schemas.openxmlformats.org/markup-compatibility/2006" xmlns:a14="http://schemas.microsoft.com/office/drawing/2010/main">
+        <mc:Choice Requires="a14">
           <p:sp>
             <p:nvSpPr>
               <p:cNvPr id="7" name="CaixaDeTexto 6">
@@ -19300,7 +20508,7 @@
             </p:txBody>
           </p:sp>
         </mc:Choice>
-        <mc:Fallback>
+        <mc:Fallback xmlns="">
           <p:sp>
             <p:nvSpPr>
               <p:cNvPr id="7" name="CaixaDeTexto 6">
@@ -20573,6 +21781,20 @@
 </file>
 
 <file path=customXml/item1.xml><?xml version="1.0" encoding="utf-8"?>
+<p:properties xmlns:p="http://schemas.microsoft.com/office/2006/metadata/properties" xmlns:xsi="http://www.w3.org/2001/XMLSchema-instance" xmlns:pc="http://schemas.microsoft.com/office/infopath/2007/PartnerControls">
+  <documentManagement>
+    <PublishingExpirationDate xmlns="http://schemas.microsoft.com/sharepoint/v3" xsi:nil="true"/>
+    <PublishingStartDate xmlns="http://schemas.microsoft.com/sharepoint/v3" xsi:nil="true"/>
+    <Country_x0020_1 xmlns="95c025fe-a600-4cde-9b8b-77161b10ab73" xsi:nil="true"/>
+    <TaxCatchAll xmlns="7338d0ee-48d0-42fd-8eee-cce9c16843bc" xsi:nil="true"/>
+    <lcf76f155ced4ddcb4097134ff3c332f xmlns="95c025fe-a600-4cde-9b8b-77161b10ab73">
+      <Terms xmlns="http://schemas.microsoft.com/office/infopath/2007/PartnerControls"/>
+    </lcf76f155ced4ddcb4097134ff3c332f>
+  </documentManagement>
+</p:properties>
+</file>
+
+<file path=customXml/item2.xml><?xml version="1.0" encoding="utf-8"?>
 <ct:contentTypeSchema xmlns:ct="http://schemas.microsoft.com/office/2006/metadata/contentType" xmlns:ma="http://schemas.microsoft.com/office/2006/metadata/properties/metaAttributes" ct:_="" ma:_="" ma:contentTypeName="Documento" ma:contentTypeID="0x010100016BCB7353188E4C9571C1B2EA1322FC" ma:contentTypeVersion="35" ma:contentTypeDescription="Crie um novo documento." ma:contentTypeScope="" ma:versionID="92c51d0239284ad1c813a13c01a4fe40">
   <xsd:schema xmlns:xsd="http://www.w3.org/2001/XMLSchema" xmlns:xs="http://www.w3.org/2001/XMLSchema" xmlns:p="http://schemas.microsoft.com/office/2006/metadata/properties" xmlns:ns1="http://schemas.microsoft.com/sharepoint/v3" xmlns:ns2="95c025fe-a600-4cde-9b8b-77161b10ab73" xmlns:ns3="7338d0ee-48d0-42fd-8eee-cce9c16843bc" targetNamespace="http://schemas.microsoft.com/office/2006/metadata/properties" ma:root="true" ma:fieldsID="6edbb47d3ff2f476a00cc06bb1101404" ns1:_="" ns2:_="" ns3:_="">
     <xsd:import namespace="http://schemas.microsoft.com/sharepoint/v3"/>
@@ -20876,20 +22098,6 @@
 </ct:contentTypeSchema>
 </file>
 
-<file path=customXml/item2.xml><?xml version="1.0" encoding="utf-8"?>
-<p:properties xmlns:p="http://schemas.microsoft.com/office/2006/metadata/properties" xmlns:xsi="http://www.w3.org/2001/XMLSchema-instance" xmlns:pc="http://schemas.microsoft.com/office/infopath/2007/PartnerControls">
-  <documentManagement>
-    <PublishingExpirationDate xmlns="http://schemas.microsoft.com/sharepoint/v3" xsi:nil="true"/>
-    <PublishingStartDate xmlns="http://schemas.microsoft.com/sharepoint/v3" xsi:nil="true"/>
-    <Country_x0020_1 xmlns="95c025fe-a600-4cde-9b8b-77161b10ab73" xsi:nil="true"/>
-    <TaxCatchAll xmlns="7338d0ee-48d0-42fd-8eee-cce9c16843bc" xsi:nil="true"/>
-    <lcf76f155ced4ddcb4097134ff3c332f xmlns="95c025fe-a600-4cde-9b8b-77161b10ab73">
-      <Terms xmlns="http://schemas.microsoft.com/office/infopath/2007/PartnerControls"/>
-    </lcf76f155ced4ddcb4097134ff3c332f>
-  </documentManagement>
-</p:properties>
-</file>
-
 <file path=customXml/item3.xml><?xml version="1.0" encoding="utf-8"?>
 <?mso-contentType ?>
 <FormTemplates xmlns="http://schemas.microsoft.com/sharepoint/v3/contenttype/forms">
@@ -20900,6 +22108,24 @@
 </file>
 
 <file path=customXml/itemProps1.xml><?xml version="1.0" encoding="utf-8"?>
+<ds:datastoreItem xmlns:ds="http://schemas.openxmlformats.org/officeDocument/2006/customXml" ds:itemID="{279FE441-B5D8-464E-B272-E5E9701C444C}">
+  <ds:schemaRefs>
+    <ds:schemaRef ds:uri="http://purl.org/dc/elements/1.1/"/>
+    <ds:schemaRef ds:uri="http://schemas.microsoft.com/sharepoint/v3"/>
+    <ds:schemaRef ds:uri="http://purl.org/dc/dcmitype/"/>
+    <ds:schemaRef ds:uri="http://schemas.microsoft.com/office/2006/documentManagement/types"/>
+    <ds:schemaRef ds:uri="http://purl.org/dc/terms/"/>
+    <ds:schemaRef ds:uri="http://www.w3.org/XML/1998/namespace"/>
+    <ds:schemaRef ds:uri="http://schemas.microsoft.com/office/infopath/2007/PartnerControls"/>
+    <ds:schemaRef ds:uri="http://schemas.microsoft.com/office/2006/metadata/properties"/>
+    <ds:schemaRef ds:uri="http://schemas.openxmlformats.org/package/2006/metadata/core-properties"/>
+    <ds:schemaRef ds:uri="7338d0ee-48d0-42fd-8eee-cce9c16843bc"/>
+    <ds:schemaRef ds:uri="95c025fe-a600-4cde-9b8b-77161b10ab73"/>
+  </ds:schemaRefs>
+</ds:datastoreItem>
+</file>
+
+<file path=customXml/itemProps2.xml><?xml version="1.0" encoding="utf-8"?>
 <ds:datastoreItem xmlns:ds="http://schemas.openxmlformats.org/officeDocument/2006/customXml" ds:itemID="{82BDDB90-0A5B-4A8F-A01B-30AFB72EE556}">
   <ds:schemaRefs>
     <ds:schemaRef ds:uri="7338d0ee-48d0-42fd-8eee-cce9c16843bc"/>
@@ -20919,24 +22145,6 @@
 </ds:datastoreItem>
 </file>
 
-<file path=customXml/itemProps2.xml><?xml version="1.0" encoding="utf-8"?>
-<ds:datastoreItem xmlns:ds="http://schemas.openxmlformats.org/officeDocument/2006/customXml" ds:itemID="{279FE441-B5D8-464E-B272-E5E9701C444C}">
-  <ds:schemaRefs>
-    <ds:schemaRef ds:uri="http://purl.org/dc/terms/"/>
-    <ds:schemaRef ds:uri="http://schemas.microsoft.com/office/2006/metadata/properties"/>
-    <ds:schemaRef ds:uri="http://schemas.microsoft.com/office/infopath/2007/PartnerControls"/>
-    <ds:schemaRef ds:uri="95c025fe-a600-4cde-9b8b-77161b10ab73"/>
-    <ds:schemaRef ds:uri="http://schemas.openxmlformats.org/package/2006/metadata/core-properties"/>
-    <ds:schemaRef ds:uri="7338d0ee-48d0-42fd-8eee-cce9c16843bc"/>
-    <ds:schemaRef ds:uri="http://schemas.microsoft.com/office/2006/documentManagement/types"/>
-    <ds:schemaRef ds:uri="http://purl.org/dc/elements/1.1/"/>
-    <ds:schemaRef ds:uri="http://schemas.microsoft.com/sharepoint/v3"/>
-    <ds:schemaRef ds:uri="http://www.w3.org/XML/1998/namespace"/>
-    <ds:schemaRef ds:uri="http://purl.org/dc/dcmitype/"/>
-  </ds:schemaRefs>
-</ds:datastoreItem>
-</file>
-
 <file path=customXml/itemProps3.xml><?xml version="1.0" encoding="utf-8"?>
 <ds:datastoreItem xmlns:ds="http://schemas.openxmlformats.org/officeDocument/2006/customXml" ds:itemID="{34FEC8D3-7B32-419B-A4A3-EBB3317EEE79}">
   <ds:schemaRefs>
